--- a/lectures/Lecture 3.2 - Building a Web Server.pptx
+++ b/lectures/Lecture 3.2 - Building a Web Server.pptx
@@ -1440,7 +1440,7 @@
             </a:pPr>
             <a:r>
               <a:rPr lang="en-US"/>
-              <a:t>Compare to the ugly socket handler from Section 1. Same functionality (GET / returns a thing) in a fraction of the code. No socket code, no byte parsing, no response construction. Just: here's a function, it's a handler for GET /.</a:t>
+              <a:t>Compare it to the ugly socket handler from Section 1 - same functionality, GET / returns a thing, in a tiny fraction of the code, with no socket code and no byte parsing and no response construction anywhere in sight. You write a function and say it handles GET /.</a:t>
             </a:r>
             <a:endParaRPr/>
           </a:p>
@@ -1591,7 +1591,7 @@
             </a:pPr>
             <a:r>
               <a:rPr lang="en-US"/>
-              <a:t>Don't try to explain decorators deeply. Name the concept, show the shape, connect it back to the routing step students saw in the ugly handler. That's enough.</a:t>
+              <a:t>Don't try to explain decorators deeply here. Name the concept, show the shape, tie it back to the routing step they saw in the ugly handler, and leave it there.</a:t>
             </a:r>
             <a:endParaRPr/>
           </a:p>
@@ -1742,7 +1742,7 @@
             </a:pPr>
             <a:r>
               <a:rPr lang="en-US"/>
-              <a:t>Don't try to explain decorators deeply. Name the concept, show the shape, connect it back to the routing step students saw in the ugly handler. That's enough.</a:t>
+              <a:t>Don't try to explain decorators deeply here. Name the concept, show the shape, tie it back to the routing step they saw in the ugly handler, and leave it there.</a:t>
             </a:r>
             <a:endParaRPr/>
           </a:p>
@@ -2518,7 +2518,7 @@
             </a:pPr>
             <a:r>
               <a:rPr lang="en-US"/>
-              <a:t>Walk through this live. Every line is doing something a framework would do for you. No routing (just an if), no body parsing, no JSON, no error handling, no concurrency (one request at a time), no graceful shutdown. And this is just the 'hello world' of web servers.</a:t>
+              <a:t>Walk this one live. Every line is doing something a framework would otherwise do for you - no routing beyond an if, no body parsing, no JSON, no error handling, no concurrency at all since it takes one request at a time, and no graceful shutdown. And this is the 'hello world' of web servers.</a:t>
             </a:r>
             <a:endParaRPr/>
           </a:p>
@@ -3455,7 +3455,7 @@
             </a:pPr>
             <a:r>
               <a:rPr lang="en-US"/>
-              <a:t>The Arc C payoff section. Every mechanic here is 'the next thing FastAPI reads off your function signature.'</a:t>
+              <a:t>This is where Arc C cashes in. Every mechanic on these slides is one more thing FastAPI reads off your function signature.</a:t>
             </a:r>
             <a:endParaRPr/>
           </a:p>
@@ -3908,7 +3908,7 @@
             </a:pPr>
             <a:r>
               <a:rPr lang="en-US"/>
-              <a:t>Pydantic is the validation engine; FastAPI is its caller. A Pydantic model is 'what a type hint looks like for a JSON body.' Same pattern as path/query params: FastAPI reads the hint, validates the input, returns 422 automatically if it's wrong. Students don't write a line of validation code.</a:t>
+              <a:t>Pydantic is the validation engine and FastAPI is just calling it. A Pydantic model is what a type hint looks like when the thing you're describing is a JSON body, and it's the same pattern as the path and query params - FastAPI reads the hint, validates the input, and hands back a 422 on its own when it's wrong. They don't write a line of validation code anywhere.</a:t>
             </a:r>
             <a:endParaRPr/>
           </a:p>
@@ -4210,7 +4210,7 @@
             </a:pPr>
             <a:r>
               <a:rPr lang="en-US"/>
-              <a:t>Transition slide. We've seen the misery. We're about to see the way out. Tee up the type hints pivot without actually introducing FastAPI yet.</a:t>
+              <a:t>Transition slide - they've felt the misery now, so tee up the type hints pivot without actually introducing FastAPI yet.</a:t>
             </a:r>
             <a:endParaRPr/>
           </a:p>
@@ -4361,7 +4361,7 @@
             </a:pPr>
             <a:r>
               <a:rPr lang="en-US"/>
-              <a:t>`Field()` is how you attach constraints to a Pydantic field. min_length, max_length, and pattern are the three you'll use most often. There are more (ge, le, gt, lt for numbers; default values; aliases). FastAPI is still just reading metadata off the signature and producing a 422 automatically. Nothing new conceptually - just richer hints.</a:t>
+              <a:t>`Field()` is how you attach constraints to a Pydantic field. min_length, max_length, and pattern are the three you'll use most often. There are more (ge, le, gt, lt for numbers; default values; aliases). FastAPI is still just reading metadata off the signature and producing a 422 on its own. Conceptually nothing new here, the hints only got richer.</a:t>
             </a:r>
             <a:endParaRPr/>
           </a:p>
@@ -4512,7 +4512,7 @@
             </a:pPr>
             <a:r>
               <a:rPr lang="en-US"/>
-              <a:t>Query() is the sibling of Field() for query parameters. The three families - Field for body models, Query for query params, Path/Header/Body for the others - all share the constraint keywords: ge, le, gt, lt, min_length, max_length, pattern. Once you learn one, you know them all. This is the validation vocabulary Assignment 2 expects you to use.</a:t>
+              <a:t>Query() is the sibling of Field() for query parameters. The three families - Field for body models, Query for query params, Path/Header/Body for the others - all share the same constraint keywords, ge, le, gt, lt, min_length, max_length, pattern, so learning one family gets you the other two for free. This is the validation vocabulary Assignment 2 expects you to use.</a:t>
             </a:r>
             <a:endParaRPr/>
           </a:p>
@@ -4814,7 +4814,7 @@
             </a:pPr>
             <a:r>
               <a:rPr lang="en-US"/>
-              <a:t>Everything students have seen since the type hints pivot comes from the same source: the function signature. FastAPI is the library that takes this idea as far as it can go. One source of truth</a:t>
+              <a:t>Everything they've seen since the type hints pivot comes off the same thing, which is the function signature, and FastAPI is basically the library that takes that idea as far as it'll go. One source of truth driving validation, serialization, AND the docs.</a:t>
             </a:r>
             <a:br>
               <a:rPr lang="en-US"/>
@@ -4824,7 +4824,7 @@
             </a:br>
             <a:r>
               <a:rPr lang="en-US"/>
-              <a:t> (the function signature) drives validation, serialization, AND docs.</a:t>
+              <a:t/>
             </a:r>
             <a:endParaRPr/>
           </a:p>
@@ -5760,7 +5760,7 @@
             </a:pPr>
             <a:r>
               <a:rPr lang="en-US"/>
-              <a:t>Frame these as contracts. One for input, one for output. Two schemas rather than one because the input doesn't have an id or timestamp yet - the server assigns those.</a:t>
+              <a:t>Frame these as contracts, one for what comes in and one for what goes out. There are two of them rather than one because the input doesn't have an id or a timestamp yet - the server is what assigns those.</a:t>
             </a:r>
             <a:endParaRPr/>
           </a:p>
@@ -6062,7 +6062,7 @@
             </a:pPr>
             <a:r>
               <a:rPr lang="en-US"/>
-              <a:t>app.py is a thin HTTP shell. Each route calls one db.* function and returns the result. Walk through response_model=list[MessageOut] (auto JSON serialization), status_code=201 (override the default 200 for resource creation), and how MessageCreate's validated fields hand directly to db.create_message. The fact that there's no SQL on this slide is the entire point - SQL belongs in db.py.</a:t>
+              <a:t>app.py is a thin HTTP shell. Each route calls one db.* function and returns the result. Walk through response_model=list[MessageOut] (auto JSON serialization), status_code=201 (override the default 200 for resource creation), and how MessageCreate's validated fields hand directly to db.create_message. And there's no SQL anywhere on this slide, which is deliberate, because the SQL belongs over in db.py.</a:t>
             </a:r>
             <a:endParaRPr/>
           </a:p>
@@ -7569,7 +7569,7 @@
             </a:pPr>
             <a:r>
               <a:rPr lang="en-US"/>
-              <a:t>If you believe type hints are just decoration, FastAPI looks like magic. Once you believe hints are *data* that other code can read, FastAPI becomes obvious instead of magical.</a:t>
+              <a:t>As long as they think type hints are decoration, FastAPI is gonna look like magic. The moment they believe hints are *data* that other code can read, the magic drains out of it and it just looks obvious.</a:t>
             </a:r>
             <a:endParaRPr/>
           </a:p>
@@ -7720,7 +7720,7 @@
             </a:pPr>
             <a:r>
               <a:rPr lang="en-US"/>
-              <a:t>If you believe type hints are just decoration, FastAPI looks like magic. Once you believe hints are *data* that other code can read, FastAPI becomes obvious instead of magical.</a:t>
+              <a:t>As long as they think type hints are decoration, FastAPI is gonna look like magic. The moment they believe hints are *data* that other code can read, the magic drains out of it and it just looks obvious.</a:t>
             </a:r>
             <a:endParaRPr/>
           </a:p>

--- a/lectures/Lecture 3.2 - Building a Web Server.pptx
+++ b/lectures/Lecture 3.2 - Building a Web Server.pptx
@@ -977,20 +977,9 @@
           </a:bodyPr>
           <a:lstStyle/>
           <a:p>
-            <a:pPr indent="0" lvl="0" marL="0" rtl="0" algn="l">
-              <a:spcBef>
-                <a:spcPts val="0"/>
-              </a:spcBef>
-              <a:spcAft>
-                <a:spcPts val="0"/>
-              </a:spcAft>
-              <a:buNone/>
-            </a:pPr>
-            <a:r>
-              <a:rPr lang="en-US"/>
-              <a:t>Through-line for the rest of the lecture: everything FastAPI does is 'library reads function signature, does work for you.' Keep pointing back to this slide.</a:t>
-            </a:r>
-            <a:endParaRPr/>
+            <a:r>
+              <a:t>Refer back to this slide for every FastAPI feature that follows.</a:t>
+            </a:r>
           </a:p>
         </p:txBody>
       </p:sp>
@@ -1127,22 +1116,7 @@
             <a:noAutofit/>
           </a:bodyPr>
           <a:lstStyle/>
-          <a:p>
-            <a:pPr indent="0" lvl="0" marL="0" rtl="0" algn="l">
-              <a:spcBef>
-                <a:spcPts val="0"/>
-              </a:spcBef>
-              <a:spcAft>
-                <a:spcPts val="0"/>
-              </a:spcAft>
-              <a:buNone/>
-            </a:pPr>
-            <a:r>
-              <a:rPr lang="en-US"/>
-              <a:t>Minimal working app. Keep it tight.</a:t>
-            </a:r>
-            <a:endParaRPr/>
-          </a:p>
+          <a:p/>
         </p:txBody>
       </p:sp>
       <p:sp>
@@ -1429,20 +1403,9 @@
           </a:bodyPr>
           <a:lstStyle/>
           <a:p>
-            <a:pPr indent="0" lvl="0" marL="0" rtl="0" algn="l">
-              <a:spcBef>
-                <a:spcPts val="0"/>
-              </a:spcBef>
-              <a:spcAft>
-                <a:spcPts val="0"/>
-              </a:spcAft>
-              <a:buNone/>
-            </a:pPr>
-            <a:r>
-              <a:rPr lang="en-US"/>
-              <a:t>Compare it to the ugly socket handler from Section 1 - same functionality, GET / returns a thing, in a tiny fraction of the code, with no socket code and no byte parsing and no response construction anywhere in sight. You write a function and say it handles GET /.</a:t>
-            </a:r>
-            <a:endParaRPr/>
+            <a:r>
+              <a:t>Compare to slide 1's socket handler: same GET, no socket or byte code.</a:t>
+            </a:r>
           </a:p>
         </p:txBody>
       </p:sp>
@@ -1580,20 +1543,9 @@
           </a:bodyPr>
           <a:lstStyle/>
           <a:p>
-            <a:pPr indent="0" lvl="0" marL="0" rtl="0" algn="l">
-              <a:spcBef>
-                <a:spcPts val="0"/>
-              </a:spcBef>
-              <a:spcAft>
-                <a:spcPts val="0"/>
-              </a:spcAft>
-              <a:buNone/>
-            </a:pPr>
-            <a:r>
-              <a:rPr lang="en-US"/>
-              <a:t>Don't try to explain decorators deeply here. Name the concept, show the shape, tie it back to the routing step they saw in the ugly handler, and leave it there.</a:t>
-            </a:r>
-            <a:endParaRPr/>
+            <a:r>
+              <a:t>Don't explain decorators deeply. Name it, show the shape, move on.</a:t>
+            </a:r>
           </a:p>
         </p:txBody>
       </p:sp>
@@ -1731,20 +1683,9 @@
           </a:bodyPr>
           <a:lstStyle/>
           <a:p>
-            <a:pPr indent="0" lvl="0" marL="0" rtl="0" algn="l">
-              <a:spcBef>
-                <a:spcPts val="0"/>
-              </a:spcBef>
-              <a:spcAft>
-                <a:spcPts val="0"/>
-              </a:spcAft>
-              <a:buNone/>
-            </a:pPr>
-            <a:r>
-              <a:rPr lang="en-US"/>
-              <a:t>Don't try to explain decorators deeply here. Name the concept, show the shape, tie it back to the routing step they saw in the ugly handler, and leave it there.</a:t>
-            </a:r>
-            <a:endParaRPr/>
+            <a:r>
+              <a:t>Don't explain decorators deeply. Name it, show the shape, move on.</a:t>
+            </a:r>
           </a:p>
         </p:txBody>
       </p:sp>
@@ -1882,27 +1823,9 @@
           </a:bodyPr>
           <a:lstStyle/>
           <a:p>
-            <a:pPr indent="0" lvl="0" marL="0" rtl="0" algn="l">
-              <a:spcBef>
-                <a:spcPts val="0"/>
-              </a:spcBef>
-              <a:spcAft>
-                <a:spcPts val="0"/>
-              </a:spcAft>
-              <a:buNone/>
-            </a:pPr>
-            <a:r>
-              <a:rPr lang="en-US"/>
-              <a:t>ASGI = Asynchronous Server Gateway Interface, successor to </a:t>
-            </a:r>
-            <a:br>
-              <a:rPr lang="en-US"/>
-            </a:br>
-            <a:r>
-              <a:rPr lang="en-US"/>
-              <a:t>WSGI = Web Server Gateway Interface</a:t>
-            </a:r>
-            <a:endParaRPr/>
+            <a:r>
+              <a:t>ASGI: Asynchronous Server Gateway Interface, successor to WSGI.</a:t>
+            </a:r>
           </a:p>
         </p:txBody>
       </p:sp>
@@ -2040,27 +1963,9 @@
           </a:bodyPr>
           <a:lstStyle/>
           <a:p>
-            <a:pPr indent="0" lvl="0" marL="0" rtl="0" algn="l">
-              <a:spcBef>
-                <a:spcPts val="0"/>
-              </a:spcBef>
-              <a:spcAft>
-                <a:spcPts val="0"/>
-              </a:spcAft>
-              <a:buNone/>
-            </a:pPr>
-            <a:r>
-              <a:rPr lang="en-US"/>
-              <a:t>ASGI = Asynchronous Server Gateway Interface, successor to </a:t>
-            </a:r>
-            <a:br>
-              <a:rPr lang="en-US"/>
-            </a:br>
-            <a:r>
-              <a:rPr lang="en-US"/>
-              <a:t>WSGI = Web Server Gateway Interface</a:t>
-            </a:r>
-            <a:endParaRPr/>
+            <a:r>
+              <a:t>ASGI: Asynchronous Server Gateway Interface, successor to WSGI.</a:t>
+            </a:r>
           </a:p>
         </p:txBody>
       </p:sp>
@@ -2198,27 +2103,9 @@
           </a:bodyPr>
           <a:lstStyle/>
           <a:p>
-            <a:pPr indent="0" lvl="0" marL="0" rtl="0" algn="l">
-              <a:spcBef>
-                <a:spcPts val="0"/>
-              </a:spcBef>
-              <a:spcAft>
-                <a:spcPts val="0"/>
-              </a:spcAft>
-              <a:buNone/>
-            </a:pPr>
-            <a:r>
-              <a:rPr lang="en-US"/>
-              <a:t>ASGI = Asynchronous Server Gateway Interface, successor to </a:t>
-            </a:r>
-            <a:br>
-              <a:rPr lang="en-US"/>
-            </a:br>
-            <a:r>
-              <a:rPr lang="en-US"/>
-              <a:t>WSGI = Web Server Gateway Interface</a:t>
-            </a:r>
-            <a:endParaRPr/>
+            <a:r>
+              <a:t>ASGI: Asynchronous Server Gateway Interface, successor to WSGI.</a:t>
+            </a:r>
           </a:p>
         </p:txBody>
       </p:sp>
@@ -2356,20 +2243,9 @@
           </a:bodyPr>
           <a:lstStyle/>
           <a:p>
-            <a:pPr indent="0" lvl="0" marL="0" rtl="0" algn="l">
-              <a:spcBef>
-                <a:spcPts val="0"/>
-              </a:spcBef>
-              <a:spcAft>
-                <a:spcPts val="0"/>
-              </a:spcAft>
-              <a:buNone/>
-            </a:pPr>
-            <a:r>
-              <a:rPr lang="en-US"/>
-              <a:t>Motivate venvs by the conflict they solve. Students who have been `pip install`ing into system Python until now have been lucky; a venv is how you stop relying on luck.</a:t>
-            </a:r>
-            <a:endParaRPr/>
+            <a:r>
+              <a:t>Point: installing into system Python has worked so far by luck.</a:t>
+            </a:r>
           </a:p>
         </p:txBody>
       </p:sp>
@@ -2507,51 +2383,9 @@
           </a:bodyPr>
           <a:lstStyle/>
           <a:p>
-            <a:pPr indent="0" lvl="0" marL="0" rtl="0" algn="l">
-              <a:spcBef>
-                <a:spcPts val="0"/>
-              </a:spcBef>
-              <a:spcAft>
-                <a:spcPts val="0"/>
-              </a:spcAft>
-              <a:buNone/>
-            </a:pPr>
-            <a:r>
-              <a:rPr lang="en-US"/>
-              <a:t>Walk this one live. Every line is doing something a framework would otherwise do for you - no routing beyond an if, no body parsing, no JSON, no error handling, no concurrency at all since it takes one request at a time, and no graceful shutdown. And this is the 'hello world' of web servers.</a:t>
-            </a:r>
-            <a:endParaRPr/>
-          </a:p>
-          <a:p>
-            <a:pPr indent="0" lvl="0" marL="0" rtl="0" algn="l">
-              <a:spcBef>
-                <a:spcPts val="0"/>
-              </a:spcBef>
-              <a:spcAft>
-                <a:spcPts val="0"/>
-              </a:spcAft>
-              <a:buNone/>
-            </a:pPr>
-            <a:r>
-              <a:t/>
-            </a:r>
-            <a:endParaRPr/>
-          </a:p>
-          <a:p>
-            <a:pPr indent="0" lvl="0" marL="0" rtl="0" algn="l">
-              <a:spcBef>
-                <a:spcPts val="0"/>
-              </a:spcBef>
-              <a:spcAft>
-                <a:spcPts val="0"/>
-              </a:spcAft>
-              <a:buNone/>
-            </a:pPr>
-            <a:r>
-              <a:rPr lang="en-US"/>
-              <a:t>I needed help to write this one.</a:t>
-            </a:r>
-            <a:endParaRPr/>
+            <a:r>
+              <a:t>Walk through live. Admit you needed help writing it.</a:t>
+            </a:r>
           </a:p>
         </p:txBody>
       </p:sp>
@@ -2689,20 +2523,9 @@
           </a:bodyPr>
           <a:lstStyle/>
           <a:p>
-            <a:pPr indent="0" lvl="0" marL="0" rtl="0" algn="l">
-              <a:spcBef>
-                <a:spcPts val="0"/>
-              </a:spcBef>
-              <a:spcAft>
-                <a:spcPts val="0"/>
-              </a:spcAft>
-              <a:buNone/>
-            </a:pPr>
-            <a:r>
-              <a:rPr lang="en-US"/>
-              <a:t>Motivate venvs by the conflict they solve. Students who have been `pip install`ing into system Python until now have been lucky; a venv is how you stop relying on luck.</a:t>
-            </a:r>
-            <a:endParaRPr/>
+            <a:r>
+              <a:t>Point: installing into system Python has worked so far by luck.</a:t>
+            </a:r>
           </a:p>
         </p:txBody>
       </p:sp>
@@ -2840,20 +2663,9 @@
           </a:bodyPr>
           <a:lstStyle/>
           <a:p>
-            <a:pPr indent="0" lvl="0" marL="0" rtl="0" algn="l">
-              <a:spcBef>
-                <a:spcPts val="0"/>
-              </a:spcBef>
-              <a:spcAft>
-                <a:spcPts val="0"/>
-              </a:spcAft>
-              <a:buNone/>
-            </a:pPr>
-            <a:r>
-              <a:rPr lang="en-US"/>
-              <a:t>Motivate venvs by the conflict they solve. Students who have been `pip install`ing into system Python until now have been lucky; a venv is how you stop relying on luck.</a:t>
-            </a:r>
-            <a:endParaRPr/>
+            <a:r>
+              <a:t>Point: installing into system Python has worked so far by luck.</a:t>
+            </a:r>
           </a:p>
         </p:txBody>
       </p:sp>
@@ -2991,20 +2803,9 @@
           </a:bodyPr>
           <a:lstStyle/>
           <a:p>
-            <a:pPr indent="0" lvl="0" marL="0" rtl="0" algn="l">
-              <a:spcBef>
-                <a:spcPts val="0"/>
-              </a:spcBef>
-              <a:spcAft>
-                <a:spcPts val="0"/>
-              </a:spcAft>
-              <a:buNone/>
-            </a:pPr>
-            <a:r>
-              <a:rPr lang="en-US"/>
-              <a:t>Motivate venvs by the conflict they solve. Students who have been `pip install`ing into system Python until now have been lucky; a venv is how you stop relying on luck.</a:t>
-            </a:r>
-            <a:endParaRPr/>
+            <a:r>
+              <a:t>Point: installing into system Python has worked so far by luck.</a:t>
+            </a:r>
           </a:p>
         </p:txBody>
       </p:sp>
@@ -3142,20 +2943,9 @@
           </a:bodyPr>
           <a:lstStyle/>
           <a:p>
-            <a:pPr indent="0" lvl="0" marL="0" rtl="0" algn="l">
-              <a:spcBef>
-                <a:spcPts val="0"/>
-              </a:spcBef>
-              <a:spcAft>
-                <a:spcPts val="0"/>
-              </a:spcAft>
-              <a:buNone/>
-            </a:pPr>
-            <a:r>
-              <a:rPr lang="en-US"/>
-              <a:t>Motivate venvs by the conflict they solve. Students who have been `pip install`ing into system Python until now have been lucky; a venv is how you stop relying on luck.</a:t>
-            </a:r>
-            <a:endParaRPr/>
+            <a:r>
+              <a:t>Point: installing into system Python has worked so far by luck.</a:t>
+            </a:r>
           </a:p>
         </p:txBody>
       </p:sp>
@@ -3293,20 +3083,9 @@
           </a:bodyPr>
           <a:lstStyle/>
           <a:p>
-            <a:pPr indent="0" lvl="0" marL="0" rtl="0" algn="l">
-              <a:spcBef>
-                <a:spcPts val="0"/>
-              </a:spcBef>
-              <a:spcAft>
-                <a:spcPts val="0"/>
-              </a:spcAft>
-              <a:buNone/>
-            </a:pPr>
-            <a:r>
-              <a:rPr lang="en-US"/>
-              <a:t>The canonical loop. `python3 -m venv venv` creates it, `source venv/bin/activate` turns it on (prompt changes to show the env name), pip installs go into the venv, `pip freeze` captures the pinned state, `pip install -r` recreates it elsewhere. This is the workflow for Assignment 2. In week 7 we'll see how Docker containers formalize the same idea.</a:t>
-            </a:r>
-            <a:endParaRPr/>
+            <a:r>
+              <a:t>This is the A2 workflow. Docker in week 7 formalizes the same idea.</a:t>
+            </a:r>
           </a:p>
         </p:txBody>
       </p:sp>
@@ -3443,22 +3222,7 @@
             <a:noAutofit/>
           </a:bodyPr>
           <a:lstStyle/>
-          <a:p>
-            <a:pPr indent="0" lvl="0" marL="0" rtl="0" algn="l">
-              <a:spcBef>
-                <a:spcPts val="0"/>
-              </a:spcBef>
-              <a:spcAft>
-                <a:spcPts val="0"/>
-              </a:spcAft>
-              <a:buNone/>
-            </a:pPr>
-            <a:r>
-              <a:rPr lang="en-US"/>
-              <a:t>This is where Arc C cashes in. Every mechanic on these slides is one more thing FastAPI reads off your function signature.</a:t>
-            </a:r>
-            <a:endParaRPr/>
-          </a:p>
+          <a:p/>
         </p:txBody>
       </p:sp>
       <p:sp>
@@ -3595,20 +3359,9 @@
           </a:bodyPr>
           <a:lstStyle/>
           <a:p>
-            <a:pPr indent="0" lvl="0" marL="0" rtl="0" algn="l">
-              <a:spcBef>
-                <a:spcPts val="0"/>
-              </a:spcBef>
-              <a:spcAft>
-                <a:spcPts val="0"/>
-              </a:spcAft>
-              <a:buNone/>
-            </a:pPr>
-            <a:r>
-              <a:rPr lang="en-US"/>
-              <a:t>Point at the `: int` hint and say: 'this is the thing FastAPI is reading.' The 422 error response is generated from that hint alone.</a:t>
-            </a:r>
-            <a:endParaRPr/>
+            <a:r>
+              <a:t>Point at `id: int`.</a:t>
+            </a:r>
           </a:p>
         </p:txBody>
       </p:sp>
@@ -3746,20 +3499,9 @@
           </a:bodyPr>
           <a:lstStyle/>
           <a:p>
-            <a:pPr indent="0" lvl="0" marL="0" rtl="0" algn="l">
-              <a:spcBef>
-                <a:spcPts val="0"/>
-              </a:spcBef>
-              <a:spcAft>
-                <a:spcPts val="0"/>
-              </a:spcAft>
-              <a:buNone/>
-            </a:pPr>
-            <a:r>
-              <a:rPr lang="en-US"/>
-              <a:t>Same trick as path parameters. Non-path arguments become query parameters. Defaults make them optional. `str | None` is the modern union syntax; works from Python 3.10+.</a:t>
-            </a:r>
-            <a:endParaRPr/>
+            <a:r>
+              <a:t>`str | None` is union syntax, Python 3.10+.</a:t>
+            </a:r>
           </a:p>
         </p:txBody>
       </p:sp>
@@ -3897,20 +3639,9 @@
           </a:bodyPr>
           <a:lstStyle/>
           <a:p>
-            <a:pPr indent="0" lvl="0" marL="0" rtl="0" algn="l">
-              <a:spcBef>
-                <a:spcPts val="0"/>
-              </a:spcBef>
-              <a:spcAft>
-                <a:spcPts val="0"/>
-              </a:spcAft>
-              <a:buNone/>
-            </a:pPr>
-            <a:r>
-              <a:rPr lang="en-US"/>
-              <a:t>Pydantic is the validation engine and FastAPI is just calling it. A Pydantic model is what a type hint looks like when the thing you're describing is a JSON body, and it's the same pattern as the path and query params - FastAPI reads the hint, validates the input, and hands back a 422 on its own when it's wrong. They don't write a line of validation code anywhere.</a:t>
-            </a:r>
-            <a:endParaRPr/>
+            <a:r>
+              <a:t>Pydantic does the validation; FastAPI just calls it.</a:t>
+            </a:r>
           </a:p>
         </p:txBody>
       </p:sp>
@@ -4048,20 +3779,9 @@
           </a:bodyPr>
           <a:lstStyle/>
           <a:p>
-            <a:pPr indent="0" lvl="0" marL="0" rtl="0" algn="l">
-              <a:spcBef>
-                <a:spcPts val="0"/>
-              </a:spcBef>
-              <a:spcAft>
-                <a:spcPts val="0"/>
-              </a:spcAft>
-              <a:buNone/>
-            </a:pPr>
-            <a:r>
-              <a:rPr lang="en-US"/>
-              <a:t>Headers are another place FastAPI can pull values from, driven by the function signature. The key new idea is the `= Header()` marker, which disambiguates it from a query param (FastAPI's default guess for non-path args). Point out the `x_author` -&gt; `X-Author` name mangling so students aren't surprised. This pattern shows up again in Assignment 2, where you'll read an X-Username header.</a:t>
-            </a:r>
-            <a:endParaRPr/>
+            <a:r>
+              <a:t>A2 uses this: X-Username header.</a:t>
+            </a:r>
           </a:p>
         </p:txBody>
       </p:sp>
@@ -4199,20 +3919,9 @@
           </a:bodyPr>
           <a:lstStyle/>
           <a:p>
-            <a:pPr indent="0" lvl="0" marL="0" rtl="0" algn="l">
-              <a:spcBef>
-                <a:spcPts val="0"/>
-              </a:spcBef>
-              <a:spcAft>
-                <a:spcPts val="0"/>
-              </a:spcAft>
-              <a:buNone/>
-            </a:pPr>
-            <a:r>
-              <a:rPr lang="en-US"/>
-              <a:t>Transition slide - they've felt the misery now, so tee up the type hints pivot without actually introducing FastAPI yet.</a:t>
-            </a:r>
-            <a:endParaRPr/>
+            <a:r>
+              <a:t>Don't introduce FastAPI yet; type hints detour first.</a:t>
+            </a:r>
           </a:p>
         </p:txBody>
       </p:sp>
@@ -4350,20 +4059,9 @@
           </a:bodyPr>
           <a:lstStyle/>
           <a:p>
-            <a:pPr indent="0" lvl="0" marL="0" rtl="0" algn="l">
-              <a:spcBef>
-                <a:spcPts val="0"/>
-              </a:spcBef>
-              <a:spcAft>
-                <a:spcPts val="0"/>
-              </a:spcAft>
-              <a:buNone/>
-            </a:pPr>
-            <a:r>
-              <a:rPr lang="en-US"/>
-              <a:t>`Field()` is how you attach constraints to a Pydantic field. min_length, max_length, and pattern are the three you'll use most often. There are more (ge, le, gt, lt for numbers; default values; aliases). FastAPI is still just reading metadata off the signature and producing a 422 on its own. Conceptually nothing new here, the hints only got richer.</a:t>
-            </a:r>
-            <a:endParaRPr/>
+            <a:r>
+              <a:t>Also ge, le, gt, lt for numbers; defaults; aliases.</a:t>
+            </a:r>
           </a:p>
         </p:txBody>
       </p:sp>
@@ -4501,20 +4199,9 @@
           </a:bodyPr>
           <a:lstStyle/>
           <a:p>
-            <a:pPr indent="0" lvl="0" marL="0" rtl="0" algn="l">
-              <a:spcBef>
-                <a:spcPts val="0"/>
-              </a:spcBef>
-              <a:spcAft>
-                <a:spcPts val="0"/>
-              </a:spcAft>
-              <a:buNone/>
-            </a:pPr>
-            <a:r>
-              <a:rPr lang="en-US"/>
-              <a:t>Query() is the sibling of Field() for query parameters. The three families - Field for body models, Query for query params, Path/Header/Body for the others - all share the same constraint keywords, ge, le, gt, lt, min_length, max_length, pattern, so learning one family gets you the other two for free. This is the validation vocabulary Assignment 2 expects you to use.</a:t>
-            </a:r>
-            <a:endParaRPr/>
+            <a:r>
+              <a:t>A2 expects these constraint keywords.</a:t>
+            </a:r>
           </a:p>
         </p:txBody>
       </p:sp>
@@ -4651,22 +4338,7 @@
             <a:noAutofit/>
           </a:bodyPr>
           <a:lstStyle/>
-          <a:p>
-            <a:pPr indent="0" lvl="0" marL="0" rtl="0" algn="l">
-              <a:spcBef>
-                <a:spcPts val="0"/>
-              </a:spcBef>
-              <a:spcAft>
-                <a:spcPts val="0"/>
-              </a:spcAft>
-              <a:buNone/>
-            </a:pPr>
-            <a:r>
-              <a:rPr lang="en-US"/>
-              <a:t>`response_model` is the type hint for what comes OUT. It lets FastAPI validate the response, serialize it, and include it in /docs. One more thing the function signature buys you.</a:t>
-            </a:r>
-            <a:endParaRPr/>
-          </a:p>
+          <a:p/>
         </p:txBody>
       </p:sp>
       <p:sp>
@@ -4803,45 +4475,9 @@
           </a:bodyPr>
           <a:lstStyle/>
           <a:p>
-            <a:pPr indent="0" lvl="0" marL="0" rtl="0" algn="l">
-              <a:spcBef>
-                <a:spcPts val="0"/>
-              </a:spcBef>
-              <a:spcAft>
-                <a:spcPts val="0"/>
-              </a:spcAft>
-              <a:buNone/>
-            </a:pPr>
-            <a:r>
-              <a:rPr lang="en-US"/>
-              <a:t>Everything they've seen since the type hints pivot comes off the same thing, which is the function signature, and FastAPI is basically the library that takes that idea as far as it'll go. One source of truth driving validation, serialization, AND the docs.</a:t>
-            </a:r>
-            <a:br>
-              <a:rPr lang="en-US"/>
-            </a:br>
-            <a:br>
-              <a:rPr lang="en-US"/>
-            </a:br>
-            <a:r>
-              <a:rPr lang="en-US"/>
-              <a:t/>
-            </a:r>
-            <a:endParaRPr/>
-          </a:p>
-          <a:p>
-            <a:pPr indent="0" lvl="0" marL="0" rtl="0" algn="l">
-              <a:spcBef>
-                <a:spcPts val="0"/>
-              </a:spcBef>
-              <a:spcAft>
-                <a:spcPts val="0"/>
-              </a:spcAft>
-              <a:buNone/>
-            </a:pPr>
-            <a:r>
-              <a:t/>
-            </a:r>
-            <a:endParaRPr/>
+            <a:r>
+              <a:t>One signature drives validation, serialization, and docs.</a:t>
+            </a:r>
           </a:p>
         </p:txBody>
       </p:sp>
@@ -4979,20 +4615,9 @@
           </a:bodyPr>
           <a:lstStyle/>
           <a:p>
-            <a:pPr indent="0" lvl="0" marL="0" rtl="0" algn="l">
-              <a:spcBef>
-                <a:spcPts val="0"/>
-              </a:spcBef>
-              <a:spcAft>
-                <a:spcPts val="0"/>
-              </a:spcAft>
-              <a:buNone/>
-            </a:pPr>
-            <a:r>
-              <a:rPr lang="en-US"/>
-              <a:t>Real project layout. This is the content students will mimic for assignment 2.</a:t>
-            </a:r>
-            <a:endParaRPr/>
+            <a:r>
+              <a:t>Layout to mimic for A2.</a:t>
+            </a:r>
           </a:p>
         </p:txBody>
       </p:sp>
@@ -5130,35 +4755,9 @@
           </a:bodyPr>
           <a:lstStyle/>
           <a:p>
-            <a:pPr indent="0" lvl="0" marL="0" rtl="0" algn="l">
-              <a:spcBef>
-                <a:spcPts val="0"/>
-              </a:spcBef>
-              <a:spcAft>
-                <a:spcPts val="0"/>
-              </a:spcAft>
-              <a:buNone/>
-            </a:pPr>
-            <a:r>
-              <a:rPr lang="en-US"/>
-              <a:t>Each file has one job, which makes testing and changes easier later.</a:t>
-            </a:r>
-            <a:endParaRPr/>
-          </a:p>
-          <a:p>
-            <a:pPr indent="0" lvl="0" marL="0" rtl="0" algn="l">
-              <a:spcBef>
-                <a:spcPts val="0"/>
-              </a:spcBef>
-              <a:spcAft>
-                <a:spcPts val="0"/>
-              </a:spcAft>
-              <a:buNone/>
-            </a:pPr>
-            <a:r>
-              <a:t/>
-            </a:r>
-            <a:endParaRPr/>
+            <a:r>
+              <a:t>One job per file: easier to test and change later.</a:t>
+            </a:r>
           </a:p>
         </p:txBody>
       </p:sp>
@@ -5296,20 +4895,9 @@
           </a:bodyPr>
           <a:lstStyle/>
           <a:p>
-            <a:pPr indent="0" lvl="0" marL="0" rtl="0" algn="l">
-              <a:spcBef>
-                <a:spcPts val="0"/>
-              </a:spcBef>
-              <a:spcAft>
-                <a:spcPts val="0"/>
-              </a:spcAft>
-              <a:buNone/>
-            </a:pPr>
-            <a:r>
-              <a:rPr lang="en-US"/>
-              <a:t>Students need to know the switch happened and roughly why, not the internals.</a:t>
-            </a:r>
-            <a:endParaRPr/>
+            <a:r>
+              <a:t>Don't go into internals.</a:t>
+            </a:r>
           </a:p>
         </p:txBody>
       </p:sp>
@@ -5447,20 +5035,9 @@
           </a:bodyPr>
           <a:lstStyle/>
           <a:p>
-            <a:pPr indent="0" lvl="0" marL="0" rtl="0" algn="l">
-              <a:spcBef>
-                <a:spcPts val="0"/>
-              </a:spcBef>
-              <a:spcAft>
-                <a:spcPts val="0"/>
-              </a:spcAft>
-              <a:buNone/>
-            </a:pPr>
-            <a:r>
-              <a:rPr lang="en-US"/>
-              <a:t>Familiar shape from 2.2, just with SQLAlchemy in front. The engine is the pool manager. init_db creates the table. Run `python db.py` once to set up the file.</a:t>
-            </a:r>
-            <a:endParaRPr/>
+            <a:r>
+              <a:t>Same shape as 2.2. Run `python db.py` once to create the table.</a:t>
+            </a:r>
           </a:p>
         </p:txBody>
       </p:sp>
@@ -5598,20 +5175,9 @@
           </a:bodyPr>
           <a:lstStyle/>
           <a:p>
-            <a:pPr indent="0" lvl="0" marL="0" rtl="0" algn="l">
-              <a:spcBef>
-                <a:spcPts val="0"/>
-              </a:spcBef>
-              <a:spcAft>
-                <a:spcPts val="0"/>
-              </a:spcAft>
-              <a:buNone/>
-            </a:pPr>
-            <a:r>
-              <a:rPr lang="en-US"/>
-              <a:t>Every SQL statement lives here. Each function is a thin wrapper over one query. list_messages returns a list of dicts; create_message returns the newly created row; delete_message returns True/False so the route can decide whether to 404. The Python parameter is named `content` to avoid shadowing sqlalchemy.text - the bind param `:text` and the column `text` stay consistent with the schema. Note datetime.now(timezone.utc) instead of utcnow() (deprecated in Python 3.12+).</a:t>
-            </a:r>
-            <a:endParaRPr/>
+            <a:r>
+              <a:t>`content` avoids shadowing `text`; `utcnow()` deprecated 3.12+; `delete_message` returns bool for 404.</a:t>
+            </a:r>
           </a:p>
         </p:txBody>
       </p:sp>
@@ -5749,20 +5315,9 @@
           </a:bodyPr>
           <a:lstStyle/>
           <a:p>
-            <a:pPr indent="0" lvl="0" marL="0" rtl="0" algn="l">
-              <a:spcBef>
-                <a:spcPts val="0"/>
-              </a:spcBef>
-              <a:spcAft>
-                <a:spcPts val="0"/>
-              </a:spcAft>
-              <a:buNone/>
-            </a:pPr>
-            <a:r>
-              <a:rPr lang="en-US"/>
-              <a:t>Frame these as contracts, one for what comes in and one for what goes out. There are two of them rather than one because the input doesn't have an id or a timestamp yet - the server is what assigns those.</a:t>
-            </a:r>
-            <a:endParaRPr/>
+            <a:r>
+              <a:t>Why two: input has no id or timestamp, server assigns them.</a:t>
+            </a:r>
           </a:p>
         </p:txBody>
       </p:sp>
@@ -5900,20 +5455,9 @@
           </a:bodyPr>
           <a:lstStyle/>
           <a:p>
-            <a:pPr indent="0" lvl="0" marL="0" rtl="0" algn="l">
-              <a:spcBef>
-                <a:spcPts val="0"/>
-              </a:spcBef>
-              <a:spcAft>
-                <a:spcPts val="0"/>
-              </a:spcAft>
-              <a:buNone/>
-            </a:pPr>
-            <a:r>
-              <a:rPr lang="en-US"/>
-              <a:t>Type hints as new material for students. Pitch as 'you've seen these in the wild, here's what they're actually for.'</a:t>
-            </a:r>
-            <a:endParaRPr/>
+            <a:r>
+              <a:t>New material. Pitch: you've seen these in the wild, here's what they're for.</a:t>
+            </a:r>
           </a:p>
         </p:txBody>
       </p:sp>
@@ -6051,20 +5595,9 @@
           </a:bodyPr>
           <a:lstStyle/>
           <a:p>
-            <a:pPr indent="0" lvl="0" marL="0" rtl="0" algn="l">
-              <a:spcBef>
-                <a:spcPts val="0"/>
-              </a:spcBef>
-              <a:spcAft>
-                <a:spcPts val="0"/>
-              </a:spcAft>
-              <a:buNone/>
-            </a:pPr>
-            <a:r>
-              <a:rPr lang="en-US"/>
-              <a:t>app.py is a thin HTTP shell. Each route calls one db.* function and returns the result. Walk through response_model=list[MessageOut] (auto JSON serialization), status_code=201 (override the default 200 for resource creation), and how MessageCreate's validated fields hand directly to db.create_message. And there's no SQL anywhere on this slide, which is deliberate, because the SQL belongs over in db.py.</a:t>
-            </a:r>
-            <a:endParaRPr/>
+            <a:r>
+              <a:t>Walk through `status_code=201`: overrides default 200 for creation.</a:t>
+            </a:r>
           </a:p>
         </p:txBody>
       </p:sp>
@@ -6202,20 +5735,9 @@
           </a:bodyPr>
           <a:lstStyle/>
           <a:p>
-            <a:pPr indent="0" lvl="0" marL="0" rtl="0" algn="l">
-              <a:spcBef>
-                <a:spcPts val="0"/>
-              </a:spcBef>
-              <a:spcAft>
-                <a:spcPts val="0"/>
-              </a:spcAft>
-              <a:buNone/>
-            </a:pPr>
-            <a:r>
-              <a:rPr lang="en-US"/>
-              <a:t>Real working session. Run `python db.py` once, start uvicorn, hit it with curl. Empty list, then a POST, then a populated list. This is what assignment 2 will feel like.</a:t>
-            </a:r>
-            <a:endParaRPr/>
+            <a:r>
+              <a:t>Run live, both terminals.</a:t>
+            </a:r>
           </a:p>
         </p:txBody>
       </p:sp>
@@ -6353,20 +5875,9 @@
           </a:bodyPr>
           <a:lstStyle/>
           <a:p>
-            <a:pPr indent="0" lvl="0" marL="0" rtl="0" algn="l">
-              <a:spcBef>
-                <a:spcPts val="0"/>
-              </a:spcBef>
-              <a:spcAft>
-                <a:spcPts val="0"/>
-              </a:spcAft>
-              <a:buNone/>
-            </a:pPr>
-            <a:r>
-              <a:rPr lang="en-US"/>
-              <a:t>HTTPException is how you bail out of a handler with a specific status code. FastAPI catches it and builds the response for you. This is the clean replacement for the manual error-building you'd have done in the raw-socket version.</a:t>
-            </a:r>
-            <a:endParaRPr/>
+            <a:r>
+              <a:t>Replaces hand-built error responses from slide 1.</a:t>
+            </a:r>
           </a:p>
         </p:txBody>
       </p:sp>
@@ -6504,20 +6015,9 @@
           </a:bodyPr>
           <a:lstStyle/>
           <a:p>
-            <a:pPr indent="0" lvl="0" marL="0" rtl="0" algn="l">
-              <a:spcBef>
-                <a:spcPts val="0"/>
-              </a:spcBef>
-              <a:spcAft>
-                <a:spcPts val="0"/>
-              </a:spcAft>
-              <a:buNone/>
-            </a:pPr>
-            <a:r>
-              <a:rPr lang="en-US"/>
-              <a:t>HTTPException is how you bail out of a handler with a specific status code. FastAPI catches it and builds the response for you. This is the clean replacement for the manual error-building you'd have done in the raw-socket version.</a:t>
-            </a:r>
-            <a:endParaRPr/>
+            <a:r>
+              <a:t>Replaces hand-built error responses from slide 1.</a:t>
+            </a:r>
           </a:p>
         </p:txBody>
       </p:sp>
@@ -6655,20 +6155,9 @@
           </a:bodyPr>
           <a:lstStyle/>
           <a:p>
-            <a:pPr indent="0" lvl="0" marL="0" rtl="0" algn="l">
-              <a:spcBef>
-                <a:spcPts val="0"/>
-              </a:spcBef>
-              <a:spcAft>
-                <a:spcPts val="0"/>
-              </a:spcAft>
-              <a:buNone/>
-            </a:pPr>
-            <a:r>
-              <a:rPr lang="en-US"/>
-              <a:t>Walk through each blank. MessageUpdate has just one field (text) because PATCH is partial - we're not changing author or timestamp. response_model=MessageOut reuses the existing output schema. The UPDATE uses a bind param for safety. After the update, re-read the row to get the canonical response.</a:t>
-            </a:r>
-            <a:endParaRPr/>
+            <a:r>
+              <a:t>Walk through blanks. One field: PATCH is partial. Re-read row after update.</a:t>
+            </a:r>
           </a:p>
         </p:txBody>
       </p:sp>
@@ -6805,22 +6294,7 @@
             <a:noAutofit/>
           </a:bodyPr>
           <a:lstStyle/>
-          <a:p>
-            <a:pPr indent="0" lvl="0" marL="0" rtl="0" algn="l">
-              <a:spcBef>
-                <a:spcPts val="0"/>
-              </a:spcBef>
-              <a:spcAft>
-                <a:spcPts val="0"/>
-              </a:spcAft>
-              <a:buNone/>
-            </a:pPr>
-            <a:r>
-              <a:rPr lang="en-US"/>
-              <a:t>Summary of the lecture as four design moves, then the assignment pointer, then the forward reference.</a:t>
-            </a:r>
-            <a:endParaRPr/>
-          </a:p>
+          <a:p/>
         </p:txBody>
       </p:sp>
       <p:sp>
@@ -6956,22 +6430,7 @@
             <a:noAutofit/>
           </a:bodyPr>
           <a:lstStyle/>
-          <a:p>
-            <a:pPr indent="0" lvl="0" marL="0" rtl="0" algn="l">
-              <a:spcBef>
-                <a:spcPts val="0"/>
-              </a:spcBef>
-              <a:spcAft>
-                <a:spcPts val="0"/>
-              </a:spcAft>
-              <a:buNone/>
-            </a:pPr>
-            <a:r>
-              <a:rPr lang="en-US"/>
-              <a:t>Summary of the lecture as four design moves, then the assignment pointer, then the forward reference.</a:t>
-            </a:r>
-            <a:endParaRPr/>
-          </a:p>
+          <a:p/>
         </p:txBody>
       </p:sp>
       <p:sp>
@@ -7558,20 +7017,9 @@
           </a:bodyPr>
           <a:lstStyle/>
           <a:p>
-            <a:pPr indent="0" lvl="0" marL="0" rtl="0" algn="l">
-              <a:spcBef>
-                <a:spcPts val="0"/>
-              </a:spcBef>
-              <a:spcAft>
-                <a:spcPts val="0"/>
-              </a:spcAft>
-              <a:buNone/>
-            </a:pPr>
-            <a:r>
-              <a:rPr lang="en-US"/>
-              <a:t>As long as they think type hints are decoration, FastAPI is gonna look like magic. The moment they believe hints are *data* that other code can read, the magic drains out of it and it just looks obvious.</a:t>
-            </a:r>
-            <a:endParaRPr/>
+            <a:r>
+              <a:t>Point: hints are data that other code can read.</a:t>
+            </a:r>
           </a:p>
         </p:txBody>
       </p:sp>
@@ -7709,20 +7157,9 @@
           </a:bodyPr>
           <a:lstStyle/>
           <a:p>
-            <a:pPr indent="0" lvl="0" marL="0" rtl="0" algn="l">
-              <a:spcBef>
-                <a:spcPts val="0"/>
-              </a:spcBef>
-              <a:spcAft>
-                <a:spcPts val="0"/>
-              </a:spcAft>
-              <a:buNone/>
-            </a:pPr>
-            <a:r>
-              <a:rPr lang="en-US"/>
-              <a:t>As long as they think type hints are decoration, FastAPI is gonna look like magic. The moment they believe hints are *data* that other code can read, the magic drains out of it and it just looks obvious.</a:t>
-            </a:r>
-            <a:endParaRPr/>
+            <a:r>
+              <a:t>Point: hints are data that other code can read.</a:t>
+            </a:r>
           </a:p>
         </p:txBody>
       </p:sp>
